--- a/projets/projet 8/final F/Nzeutom_Lucien_1_fichier_022026/Analyse_Sociodemographique_OpenClassrooms.pptx
+++ b/projets/projet 8/final F/Nzeutom_Lucien_1_fichier_022026/Analyse_Sociodemographique_OpenClassrooms.pptx
@@ -7535,7 +7535,39 @@
                   <a:srgbClr val="FFFFFF"/>
                 </a:solidFill>
               </a:rPr>
-              <a:t>Total : 4 647 étudiants analysés sur 4 ans</a:t>
+              <a:t>Total </a:t>
+            </a:r>
+            <a:r>
+              <a:rPr lang="en-US" sz="1800" b="1">
+                <a:solidFill>
+                  <a:srgbClr val="FFFFFF"/>
+                </a:solidFill>
+              </a:rPr>
+              <a:t>: +4 </a:t>
+            </a:r>
+            <a:r>
+              <a:rPr lang="en-US" b="1">
+                <a:solidFill>
+                  <a:srgbClr val="FFFFFF"/>
+                </a:solidFill>
+              </a:rPr>
+              <a:t>000</a:t>
+            </a:r>
+            <a:r>
+              <a:rPr lang="en-US" sz="1800" b="1">
+                <a:solidFill>
+                  <a:srgbClr val="FFFFFF"/>
+                </a:solidFill>
+              </a:rPr>
+              <a:t> </a:t>
+            </a:r>
+            <a:r>
+              <a:rPr lang="en-US" sz="1800" b="1" dirty="0">
+                <a:solidFill>
+                  <a:srgbClr val="FFFFFF"/>
+                </a:solidFill>
+              </a:rPr>
+              <a:t>étudiants analysés sur 4 ans</a:t>
             </a:r>
             <a:endParaRPr lang="en-US" sz="1800" dirty="0"/>
           </a:p>
